--- a/01_FoundationProjects/MFL01_Servo_Control/MFL01_Servo_Control.pptx
+++ b/01_FoundationProjects/MFL01_Servo_Control/MFL01_Servo_Control.pptx
@@ -206,7 +206,7 @@
           <a:p>
             <a:fld id="{393FEA32-2B8B-4244-A536-214CF6D4B9AB}" type="datetimeFigureOut">
               <a:rPr lang="en-GB" smtClean="0"/>
-              <a:t>17/01/2026</a:t>
+              <a:t>18/01/2026</a:t>
             </a:fld>
             <a:endParaRPr lang="en-GB"/>
           </a:p>
@@ -6485,7 +6485,7 @@
               <a:rPr lang="en-GB" dirty="0">
                 <a:hlinkClick r:id="rId2"/>
               </a:rPr>
-              <a:t>https://github.com/info-zas/zas-robotics-motion/blob/main/01_FoundationProjects/MFL01/MFL01/MFL01.ino</a:t>
+              <a:t>https://github.com/info-zas/zas-robotics-motion/tree/main/01_FoundationProjects/MFL01_Servo_Control/MFL01_Servo</a:t>
             </a:r>
             <a:endParaRPr lang="en-GB" dirty="0"/>
           </a:p>
@@ -6621,7 +6621,7 @@
             </a:pPr>
             <a:r>
               <a:rPr lang="en-GB" b="1" dirty="0"/>
-              <a:t>Code for Lesson MFL01 (MFL01.ino):</a:t>
+              <a:t>Code for Lesson MFL01 (MFL01_Servo.ino):</a:t>
             </a:r>
           </a:p>
         </p:txBody>
@@ -6803,7 +6803,7 @@
         <p:spPr>
           <a:xfrm>
             <a:off x="838200" y="1825625"/>
-            <a:ext cx="6005052" cy="1328569"/>
+            <a:ext cx="6005052" cy="1051570"/>
           </a:xfrm>
           <a:prstGeom prst="rect">
             <a:avLst/>
@@ -6918,7 +6918,7 @@
           <a:p>
             <a:r>
               <a:rPr lang="en-GB" sz="2000" b="1" dirty="0"/>
-              <a:t>Execute the same code (MFL01.ino) in the Motion Creative Board</a:t>
+              <a:t>Execute the same code in the Motion Creative Board</a:t>
             </a:r>
           </a:p>
         </p:txBody>
@@ -7325,7 +7325,7 @@
             </a:pPr>
             <a:r>
               <a:rPr lang="en-GB" b="1" dirty="0"/>
-              <a:t>Code for Lesson MFL01 (MFL01.ino):</a:t>
+              <a:t>Code for Lesson MFL01 (MFL01_Servo.ino):</a:t>
             </a:r>
           </a:p>
         </p:txBody>
@@ -7459,7 +7459,7 @@
               <a:rPr lang="en-GB" dirty="0">
                 <a:hlinkClick r:id="rId5"/>
               </a:rPr>
-              <a:t>https://github.com/info-zas/zas-robotics-motion/blob/main/01_FoundationProjects/MFL01/MFL01/MFL01.ino</a:t>
+              <a:t>https://github.com/info-zas/zas-robotics-motion/tree/main/01_FoundationProjects/MFL01_Servo_Control/MFL01_Servo</a:t>
             </a:r>
             <a:endParaRPr lang="en-GB" dirty="0"/>
           </a:p>
@@ -7528,7 +7528,7 @@
                 <a:ea typeface="Calibri Light" panose="020F0302020204030204" pitchFamily="34" charset="0"/>
                 <a:cs typeface="Calibri Light" panose="020F0302020204030204" pitchFamily="34" charset="0"/>
               </a:rPr>
-              <a:t>MFL01_a : Servo Motor Control </a:t>
+              <a:t>MFL01 : Servo Motor Control </a:t>
             </a:r>
             <a:br>
               <a:rPr lang="en-GB" b="1" dirty="0">
@@ -7577,16 +7577,7 @@
           <a:p>
             <a:r>
               <a:rPr lang="en-GB" sz="2000" b="1" dirty="0"/>
-              <a:t>Execute the code (MFL01_a.ino) </a:t>
-            </a:r>
-          </a:p>
-          <a:p>
-            <a:pPr marL="0" indent="0">
-              <a:buNone/>
-            </a:pPr>
-            <a:r>
-              <a:rPr lang="en-GB" sz="2000" b="1" dirty="0"/>
-              <a:t>to control the servo motor with </a:t>
+              <a:t>Execute the code to control the servo motor with </a:t>
             </a:r>
           </a:p>
           <a:p>
@@ -7851,7 +7842,7 @@
         </p:nvSpPr>
         <p:spPr>
           <a:xfrm>
-            <a:off x="781444" y="2932043"/>
+            <a:off x="771939" y="2651022"/>
             <a:ext cx="6096000" cy="2585323"/>
           </a:xfrm>
           <a:prstGeom prst="rect">
@@ -8058,7 +8049,7 @@
         </p:nvSpPr>
         <p:spPr bwMode="auto">
           <a:xfrm>
-            <a:off x="771939" y="5576798"/>
+            <a:off x="771939" y="5236345"/>
             <a:ext cx="5599912" cy="1477328"/>
           </a:xfrm>
           <a:prstGeom prst="rect">
@@ -8176,7 +8167,7 @@
             </a:pPr>
             <a:r>
               <a:rPr lang="en-GB" b="1" dirty="0"/>
-              <a:t>Code for Lesson MFL01_a (MFL01_a.ino):</a:t>
+              <a:t>Code for Lesson MFL01 (MFL01_Servo_Pot.ino):</a:t>
             </a:r>
           </a:p>
           <a:p>
@@ -8187,7 +8178,7 @@
               <a:rPr lang="en-GB" b="1" dirty="0">
                 <a:hlinkClick r:id="rId4"/>
               </a:rPr>
-              <a:t>https://github.com/info-zas/zas-robotics-motion/blob/main/01_FoundationProjects/MFL01/MFL01_a/MFL01_a.ino</a:t>
+              <a:t>https://github.com/info-zas/zas-robotics-motion/tree/main/01_FoundationProjects/MFL01_Servo_Control/MFL01_Servo_Pot</a:t>
             </a:r>
             <a:endParaRPr lang="en-GB" b="1" dirty="0"/>
           </a:p>
